--- a/docs/exec-brief/woomi-agent-template-exec-brief.pptx
+++ b/docs/exec-brief/woomi-agent-template-exec-brief.pptx
@@ -5238,7 +5238,7 @@
                 <a:ea typeface="Malgun Gothic" pitchFamily="34" charset="-122"/>
                 <a:cs typeface="Malgun Gothic" pitchFamily="34" charset="-120"/>
               </a:rPr>
-              <a:t>QUICKSTART + 위키 46면</a:t>
+              <a:t>QUICKSTART + 위키 47면</a:t>
             </a:r>
             <a:endParaRPr lang="en-US" sz="975" dirty="0"/>
           </a:p>
@@ -9291,7 +9291,7 @@
                 <a:ea typeface="Malgun Gothic" pitchFamily="34" charset="-122"/>
                 <a:cs typeface="Malgun Gothic" pitchFamily="34" charset="-120"/>
               </a:rPr>
-              <a:t>46</a:t>
+              <a:t>47</a:t>
             </a:r>
             <a:endParaRPr lang="en-US" sz="1950" dirty="0"/>
           </a:p>
